--- a/Compte_Rendu/Presentation_bts_final.pptx
+++ b/Compte_Rendu/Presentation_bts_final.pptx
@@ -314,7 +314,7 @@
           <a:p>
             <a:fld id="{5BCAD085-E8A6-8845-BD4E-CB4CCA059FC4}" type="datetimeFigureOut">
               <a:rPr lang="en-US" smtClean="0"/>
-              <a:t>5/7/2026</a:t>
+              <a:t>5/10/2026</a:t>
             </a:fld>
             <a:endParaRPr lang="en-US"/>
           </a:p>
@@ -484,7 +484,7 @@
           <a:p>
             <a:fld id="{5BCAD085-E8A6-8845-BD4E-CB4CCA059FC4}" type="datetimeFigureOut">
               <a:rPr lang="en-US" smtClean="0"/>
-              <a:t>5/7/2026</a:t>
+              <a:t>5/10/2026</a:t>
             </a:fld>
             <a:endParaRPr lang="en-US"/>
           </a:p>
@@ -664,7 +664,7 @@
           <a:p>
             <a:fld id="{5BCAD085-E8A6-8845-BD4E-CB4CCA059FC4}" type="datetimeFigureOut">
               <a:rPr lang="en-US" smtClean="0"/>
-              <a:t>5/7/2026</a:t>
+              <a:t>5/10/2026</a:t>
             </a:fld>
             <a:endParaRPr lang="en-US"/>
           </a:p>
@@ -834,7 +834,7 @@
           <a:p>
             <a:fld id="{5BCAD085-E8A6-8845-BD4E-CB4CCA059FC4}" type="datetimeFigureOut">
               <a:rPr lang="en-US" smtClean="0"/>
-              <a:t>5/7/2026</a:t>
+              <a:t>5/10/2026</a:t>
             </a:fld>
             <a:endParaRPr lang="en-US"/>
           </a:p>
@@ -1080,7 +1080,7 @@
           <a:p>
             <a:fld id="{5BCAD085-E8A6-8845-BD4E-CB4CCA059FC4}" type="datetimeFigureOut">
               <a:rPr lang="en-US" smtClean="0"/>
-              <a:t>5/7/2026</a:t>
+              <a:t>5/10/2026</a:t>
             </a:fld>
             <a:endParaRPr lang="en-US"/>
           </a:p>
@@ -1368,7 +1368,7 @@
           <a:p>
             <a:fld id="{5BCAD085-E8A6-8845-BD4E-CB4CCA059FC4}" type="datetimeFigureOut">
               <a:rPr lang="en-US" smtClean="0"/>
-              <a:t>5/7/2026</a:t>
+              <a:t>5/10/2026</a:t>
             </a:fld>
             <a:endParaRPr lang="en-US"/>
           </a:p>
@@ -1790,7 +1790,7 @@
           <a:p>
             <a:fld id="{5BCAD085-E8A6-8845-BD4E-CB4CCA059FC4}" type="datetimeFigureOut">
               <a:rPr lang="en-US" smtClean="0"/>
-              <a:t>5/7/2026</a:t>
+              <a:t>5/10/2026</a:t>
             </a:fld>
             <a:endParaRPr lang="en-US"/>
           </a:p>
@@ -1908,7 +1908,7 @@
           <a:p>
             <a:fld id="{5BCAD085-E8A6-8845-BD4E-CB4CCA059FC4}" type="datetimeFigureOut">
               <a:rPr lang="en-US" smtClean="0"/>
-              <a:t>5/7/2026</a:t>
+              <a:t>5/10/2026</a:t>
             </a:fld>
             <a:endParaRPr lang="en-US"/>
           </a:p>
@@ -2003,7 +2003,7 @@
           <a:p>
             <a:fld id="{5BCAD085-E8A6-8845-BD4E-CB4CCA059FC4}" type="datetimeFigureOut">
               <a:rPr lang="en-US" smtClean="0"/>
-              <a:t>5/7/2026</a:t>
+              <a:t>5/10/2026</a:t>
             </a:fld>
             <a:endParaRPr lang="en-US"/>
           </a:p>
@@ -2280,7 +2280,7 @@
           <a:p>
             <a:fld id="{5BCAD085-E8A6-8845-BD4E-CB4CCA059FC4}" type="datetimeFigureOut">
               <a:rPr lang="en-US" smtClean="0"/>
-              <a:t>5/7/2026</a:t>
+              <a:t>5/10/2026</a:t>
             </a:fld>
             <a:endParaRPr lang="en-US"/>
           </a:p>
@@ -2533,7 +2533,7 @@
           <a:p>
             <a:fld id="{5BCAD085-E8A6-8845-BD4E-CB4CCA059FC4}" type="datetimeFigureOut">
               <a:rPr lang="en-US" smtClean="0"/>
-              <a:t>5/7/2026</a:t>
+              <a:t>5/10/2026</a:t>
             </a:fld>
             <a:endParaRPr lang="en-US"/>
           </a:p>
@@ -2746,7 +2746,7 @@
           <a:p>
             <a:fld id="{5BCAD085-E8A6-8845-BD4E-CB4CCA059FC4}" type="datetimeFigureOut">
               <a:rPr lang="en-US" smtClean="0"/>
-              <a:t>5/7/2026</a:t>
+              <a:t>5/10/2026</a:t>
             </a:fld>
             <a:endParaRPr lang="en-US"/>
           </a:p>
@@ -8193,7 +8193,7 @@
         <p:spPr>
           <a:xfrm>
             <a:off x="2194560" y="3273552"/>
-            <a:ext cx="6309360" cy="320040"/>
+            <a:ext cx="6309360" cy="246221"/>
           </a:xfrm>
           <a:prstGeom prst="rect">
             <a:avLst/>
@@ -8226,23 +8226,20 @@
               <a:t> automobile / fabrication </a:t>
             </a:r>
             <a:r>
-              <a:rPr sz="1000" b="0" i="0" dirty="0" err="1">
+              <a:rPr lang="fr-FR" sz="1000" dirty="0" smtClean="0">
                 <a:solidFill>
                   <a:srgbClr val="FFFFFF"/>
                 </a:solidFill>
                 <a:latin typeface="Calibri"/>
               </a:rPr>
-              <a:t>d'equipements</a:t>
-            </a:r>
-            <a:r>
-              <a:rPr sz="1000" b="0" i="0" dirty="0">
-                <a:solidFill>
-                  <a:srgbClr val="FFFFFF"/>
-                </a:solidFill>
-                <a:latin typeface="Calibri"/>
-              </a:rPr>
-              <a:t> de transport</a:t>
-            </a:r>
+              <a:t>de boîtes de vitesse</a:t>
+            </a:r>
+            <a:endParaRPr sz="1000" b="0" i="0" dirty="0">
+              <a:solidFill>
+                <a:srgbClr val="FFFFFF"/>
+              </a:solidFill>
+              <a:latin typeface="Calibri"/>
+            </a:endParaRPr>
           </a:p>
         </p:txBody>
       </p:sp>
@@ -9392,118 +9389,6 @@
       </p:sp>
       <p:sp>
         <p:nvSpPr>
-          <p:cNvPr id="16" name="Oval 15"/>
-          <p:cNvSpPr/>
-          <p:nvPr/>
-        </p:nvSpPr>
-        <p:spPr>
-          <a:xfrm>
-            <a:off x="4892040" y="3236976"/>
-            <a:ext cx="201168" cy="201168"/>
-          </a:xfrm>
-          <a:prstGeom prst="ellipse">
-            <a:avLst/>
-          </a:prstGeom>
-          <a:solidFill>
-            <a:srgbClr val="1A3A8F"/>
-          </a:solidFill>
-          <a:ln>
-            <a:noFill/>
-          </a:ln>
-        </p:spPr>
-        <p:style>
-          <a:lnRef idx="1">
-            <a:schemeClr val="accent1"/>
-          </a:lnRef>
-          <a:fillRef idx="3">
-            <a:schemeClr val="accent1"/>
-          </a:fillRef>
-          <a:effectRef idx="2">
-            <a:schemeClr val="accent1"/>
-          </a:effectRef>
-          <a:fontRef idx="minor">
-            <a:schemeClr val="lt1"/>
-          </a:fontRef>
-        </p:style>
-        <p:txBody>
-          <a:bodyPr rtlCol="0" anchor="ctr"/>
-          <a:lstStyle/>
-          <a:p>
-            <a:pPr algn="ctr"/>
-            <a:endParaRPr/>
-          </a:p>
-        </p:txBody>
-      </p:sp>
-      <p:sp>
-        <p:nvSpPr>
-          <p:cNvPr id="17" name="TextBox 16"/>
-          <p:cNvSpPr txBox="1"/>
-          <p:nvPr/>
-        </p:nvSpPr>
-        <p:spPr>
-          <a:xfrm>
-            <a:off x="5193792" y="3209544"/>
-            <a:ext cx="3429000" cy="269304"/>
-          </a:xfrm>
-          <a:prstGeom prst="rect">
-            <a:avLst/>
-          </a:prstGeom>
-          <a:noFill/>
-        </p:spPr>
-        <p:txBody>
-          <a:bodyPr wrap="square">
-            <a:spAutoFit/>
-          </a:bodyPr>
-          <a:lstStyle/>
-          <a:p>
-            <a:pPr algn="l"/>
-            <a:r>
-              <a:rPr sz="1150" b="0" i="0" dirty="0">
-                <a:solidFill>
-                  <a:srgbClr val="0A1530"/>
-                </a:solidFill>
-                <a:latin typeface="Calibri"/>
-              </a:rPr>
-              <a:t>Verification des </a:t>
-            </a:r>
-            <a:r>
-              <a:rPr sz="1150" b="0" i="0" dirty="0" err="1">
-                <a:solidFill>
-                  <a:srgbClr val="0A1530"/>
-                </a:solidFill>
-                <a:latin typeface="Calibri"/>
-              </a:rPr>
-              <a:t>licences</a:t>
-            </a:r>
-            <a:r>
-              <a:rPr sz="1150" b="0" i="0" dirty="0">
-                <a:solidFill>
-                  <a:srgbClr val="0A1530"/>
-                </a:solidFill>
-                <a:latin typeface="Calibri"/>
-              </a:rPr>
-              <a:t> </a:t>
-            </a:r>
-            <a:r>
-              <a:rPr lang="fr-FR" sz="1150" dirty="0" smtClean="0">
-                <a:solidFill>
-                  <a:srgbClr val="0A1530"/>
-                </a:solidFill>
-                <a:latin typeface="Calibri"/>
-              </a:rPr>
-              <a:t>Microsoft</a:t>
-            </a:r>
-            <a:endParaRPr sz="1150" b="0" i="0" dirty="0">
-              <a:solidFill>
-                <a:srgbClr val="0A1530"/>
-              </a:solidFill>
-              <a:latin typeface="Calibri"/>
-            </a:endParaRPr>
-          </a:p>
-        </p:txBody>
-      </p:sp>
-      <p:sp>
-        <p:nvSpPr>
           <p:cNvPr id="20" name="Rounded Rectangle 19"/>
           <p:cNvSpPr/>
           <p:nvPr/>
@@ -12122,112 +12007,13 @@
               <a:t>et </a:t>
             </a:r>
             <a:r>
-              <a:rPr sz="1100" b="0" i="0" dirty="0" err="1">
+              <a:rPr lang="fr-FR" sz="1100" dirty="0" smtClean="0">
                 <a:solidFill>
                   <a:srgbClr val="7AAFF5"/>
                 </a:solidFill>
                 <a:latin typeface="Calibri"/>
               </a:rPr>
-              <a:t>l'image</a:t>
-            </a:r>
-            <a:r>
-              <a:rPr sz="1100" b="0" i="0" dirty="0">
-                <a:solidFill>
-                  <a:srgbClr val="7AAFF5"/>
-                </a:solidFill>
-                <a:latin typeface="Calibri"/>
-              </a:rPr>
-              <a:t> </a:t>
-            </a:r>
-            <a:r>
-              <a:rPr sz="1100" b="0" i="0" dirty="0" err="1" smtClean="0">
-                <a:solidFill>
-                  <a:srgbClr val="7AAFF5"/>
-                </a:solidFill>
-                <a:latin typeface="Calibri"/>
-              </a:rPr>
-              <a:t>num</a:t>
-            </a:r>
-            <a:r>
-              <a:rPr lang="fr-FR" sz="1100" b="0" i="0" dirty="0" smtClean="0">
-                <a:solidFill>
-                  <a:srgbClr val="7AAFF5"/>
-                </a:solidFill>
-                <a:latin typeface="Calibri"/>
-              </a:rPr>
-              <a:t>é</a:t>
-            </a:r>
-            <a:r>
-              <a:rPr sz="1100" b="0" i="0" dirty="0" err="1" smtClean="0">
-                <a:solidFill>
-                  <a:srgbClr val="7AAFF5"/>
-                </a:solidFill>
-                <a:latin typeface="Calibri"/>
-              </a:rPr>
-              <a:t>rique</a:t>
-            </a:r>
-            <a:r>
-              <a:rPr sz="1100" b="0" i="0" dirty="0" smtClean="0">
-                <a:solidFill>
-                  <a:srgbClr val="7AAFF5"/>
-                </a:solidFill>
-                <a:latin typeface="Calibri"/>
-              </a:rPr>
-              <a:t> </a:t>
-            </a:r>
-            <a:r>
-              <a:rPr sz="1100" b="0" i="0" dirty="0">
-                <a:solidFill>
-                  <a:srgbClr val="7AAFF5"/>
-                </a:solidFill>
-                <a:latin typeface="Calibri"/>
-              </a:rPr>
-              <a:t>de </a:t>
-            </a:r>
-            <a:r>
-              <a:rPr sz="1100" b="0" i="0" dirty="0" err="1">
-                <a:solidFill>
-                  <a:srgbClr val="7AAFF5"/>
-                </a:solidFill>
-                <a:latin typeface="Calibri"/>
-              </a:rPr>
-              <a:t>l'organisation</a:t>
-            </a:r>
-            <a:r>
-              <a:rPr sz="1100" b="0" i="0" dirty="0">
-                <a:solidFill>
-                  <a:srgbClr val="7AAFF5"/>
-                </a:solidFill>
-                <a:latin typeface="Calibri"/>
-              </a:rPr>
-              <a:t> via </a:t>
-            </a:r>
-            <a:r>
-              <a:rPr sz="1100" b="0" i="0" dirty="0" err="1">
-                <a:solidFill>
-                  <a:srgbClr val="7AAFF5"/>
-                </a:solidFill>
-                <a:latin typeface="Calibri"/>
-              </a:rPr>
-              <a:t>une</a:t>
-            </a:r>
-            <a:r>
-              <a:rPr sz="1100" b="0" i="0" dirty="0">
-                <a:solidFill>
-                  <a:srgbClr val="7AAFF5"/>
-                </a:solidFill>
-                <a:latin typeface="Calibri"/>
-              </a:rPr>
-              <a:t> interface </a:t>
-            </a:r>
-            <a:r>
-              <a:rPr sz="1100" b="0" i="0" dirty="0" err="1">
-                <a:solidFill>
-                  <a:srgbClr val="7AAFF5"/>
-                </a:solidFill>
-                <a:latin typeface="Calibri"/>
-              </a:rPr>
-              <a:t>claire</a:t>
+              <a:t>le suivi de mes projets au cours des deux dernières années.</a:t>
             </a:r>
             <a:endParaRPr sz="1100" b="0" i="0" dirty="0">
               <a:solidFill>
@@ -14409,11 +14195,7 @@
             </a:r>
             <a:r>
               <a:rPr lang="fr-FR" sz="1200" dirty="0" smtClean="0"/>
-              <a:t>R</a:t>
-            </a:r>
-            <a:r>
-              <a:rPr lang="fr-FR" sz="1200" dirty="0" smtClean="0"/>
-              <a:t>A est </a:t>
+              <a:t>RA est </a:t>
             </a:r>
             <a:r>
               <a:rPr lang="fr-FR" sz="1200" dirty="0"/>

--- a/Compte_Rendu/Presentation_bts_final.pptx
+++ b/Compte_Rendu/Presentation_bts_final.pptx
@@ -3537,6 +3537,13 @@
   <p:clrMapOvr>
     <a:masterClrMapping/>
   </p:clrMapOvr>
+  <p:timing>
+    <p:tnLst>
+      <p:par>
+        <p:cTn id="1" dur="indefinite" restart="never" nodeType="tmRoot"/>
+      </p:par>
+    </p:tnLst>
+  </p:timing>
 </p:sld>
 </file>
 
@@ -4452,7 +4459,23 @@
                   <a:srgbClr val="7AAFF5"/>
                 </a:solidFill>
               </a:rPr>
-              <a:t>d'une veille informatique, notamment sur les effets de l’expansion de l’intelligence artificielle de l’IA sur la RAM et le CLOUD</a:t>
+              <a:t>d'une veille informatique, notamment sur les effets de l’expansion de l’intelligence artificielle </a:t>
+            </a:r>
+            <a:r>
+              <a:rPr lang="fr-FR" sz="1100" dirty="0" smtClean="0">
+                <a:solidFill>
+                  <a:srgbClr val="7AAFF5"/>
+                </a:solidFill>
+              </a:rPr>
+              <a:t>sur </a:t>
+            </a:r>
+            <a:r>
+              <a:rPr lang="fr-FR" sz="1100" dirty="0" smtClean="0">
+                <a:solidFill>
+                  <a:srgbClr val="7AAFF5"/>
+                </a:solidFill>
+              </a:rPr>
+              <a:t>la RAM et le CLOUD</a:t>
             </a:r>
             <a:endParaRPr sz="1100" b="0" i="0" dirty="0">
               <a:solidFill>
@@ -4522,6 +4545,13 @@
   <p:clrMapOvr>
     <a:masterClrMapping/>
   </p:clrMapOvr>
+  <p:timing>
+    <p:tnLst>
+      <p:par>
+        <p:cTn id="1" dur="indefinite" restart="never" nodeType="tmRoot"/>
+      </p:par>
+    </p:tnLst>
+  </p:timing>
 </p:sld>
 </file>
 
@@ -4713,6 +4743,13 @@
   <p:clrMapOvr>
     <a:masterClrMapping/>
   </p:clrMapOvr>
+  <p:timing>
+    <p:tnLst>
+      <p:par>
+        <p:cTn id="1" dur="indefinite" restart="never" nodeType="tmRoot"/>
+      </p:par>
+    </p:tnLst>
+  </p:timing>
 </p:sld>
 </file>
 
@@ -6155,6 +6192,13 @@
   <p:clrMapOvr>
     <a:masterClrMapping/>
   </p:clrMapOvr>
+  <p:timing>
+    <p:tnLst>
+      <p:par>
+        <p:cTn id="1" dur="indefinite" restart="never" nodeType="tmRoot"/>
+      </p:par>
+    </p:tnLst>
+  </p:timing>
 </p:sld>
 </file>
 
@@ -7341,6 +7385,13 @@
   <p:clrMapOvr>
     <a:masterClrMapping/>
   </p:clrMapOvr>
+  <p:timing>
+    <p:tnLst>
+      <p:par>
+        <p:cTn id="1" dur="indefinite" restart="never" nodeType="tmRoot"/>
+      </p:par>
+    </p:tnLst>
+  </p:timing>
 </p:sld>
 </file>
 
@@ -8476,6 +8527,13 @@
   <p:clrMapOvr>
     <a:masterClrMapping/>
   </p:clrMapOvr>
+  <p:timing>
+    <p:tnLst>
+      <p:par>
+        <p:cTn id="1" dur="indefinite" restart="never" nodeType="tmRoot"/>
+      </p:par>
+    </p:tnLst>
+  </p:timing>
 </p:sld>
 </file>
 
@@ -9446,6 +9504,13 @@
   <p:clrMapOvr>
     <a:masterClrMapping/>
   </p:clrMapOvr>
+  <p:timing>
+    <p:tnLst>
+      <p:par>
+        <p:cTn id="1" dur="indefinite" restart="never" nodeType="tmRoot"/>
+      </p:par>
+    </p:tnLst>
+  </p:timing>
 </p:sld>
 </file>
 
@@ -11061,6 +11126,13 @@
   <p:clrMapOvr>
     <a:masterClrMapping/>
   </p:clrMapOvr>
+  <p:timing>
+    <p:tnLst>
+      <p:par>
+        <p:cTn id="1" dur="indefinite" restart="never" nodeType="tmRoot"/>
+      </p:par>
+    </p:tnLst>
+  </p:timing>
 </p:sld>
 </file>
 
@@ -12083,6 +12155,13 @@
   <p:clrMapOvr>
     <a:masterClrMapping/>
   </p:clrMapOvr>
+  <p:timing>
+    <p:tnLst>
+      <p:par>
+        <p:cTn id="1" dur="indefinite" restart="never" nodeType="tmRoot"/>
+      </p:par>
+    </p:tnLst>
+  </p:timing>
 </p:sld>
 </file>
 
@@ -13503,6 +13582,13 @@
   <p:clrMapOvr>
     <a:masterClrMapping/>
   </p:clrMapOvr>
+  <p:timing>
+    <p:tnLst>
+      <p:par>
+        <p:cTn id="1" dur="indefinite" restart="never" nodeType="tmRoot"/>
+      </p:par>
+    </p:tnLst>
+  </p:timing>
 </p:sld>
 </file>
 
@@ -14546,6 +14632,13 @@
   <p:clrMapOvr>
     <a:masterClrMapping/>
   </p:clrMapOvr>
+  <p:timing>
+    <p:tnLst>
+      <p:par>
+        <p:cTn id="1" dur="indefinite" restart="never" nodeType="tmRoot"/>
+      </p:par>
+    </p:tnLst>
+  </p:timing>
 </p:sld>
 </file>
 

--- a/Compte_Rendu/Presentation_bts_final.pptx
+++ b/Compte_Rendu/Presentation_bts_final.pptx
@@ -314,7 +314,7 @@
           <a:p>
             <a:fld id="{5BCAD085-E8A6-8845-BD4E-CB4CCA059FC4}" type="datetimeFigureOut">
               <a:rPr lang="en-US" smtClean="0"/>
-              <a:t>5/10/2026</a:t>
+              <a:t>5/11/2026</a:t>
             </a:fld>
             <a:endParaRPr lang="en-US"/>
           </a:p>
@@ -484,7 +484,7 @@
           <a:p>
             <a:fld id="{5BCAD085-E8A6-8845-BD4E-CB4CCA059FC4}" type="datetimeFigureOut">
               <a:rPr lang="en-US" smtClean="0"/>
-              <a:t>5/10/2026</a:t>
+              <a:t>5/11/2026</a:t>
             </a:fld>
             <a:endParaRPr lang="en-US"/>
           </a:p>
@@ -664,7 +664,7 @@
           <a:p>
             <a:fld id="{5BCAD085-E8A6-8845-BD4E-CB4CCA059FC4}" type="datetimeFigureOut">
               <a:rPr lang="en-US" smtClean="0"/>
-              <a:t>5/10/2026</a:t>
+              <a:t>5/11/2026</a:t>
             </a:fld>
             <a:endParaRPr lang="en-US"/>
           </a:p>
@@ -834,7 +834,7 @@
           <a:p>
             <a:fld id="{5BCAD085-E8A6-8845-BD4E-CB4CCA059FC4}" type="datetimeFigureOut">
               <a:rPr lang="en-US" smtClean="0"/>
-              <a:t>5/10/2026</a:t>
+              <a:t>5/11/2026</a:t>
             </a:fld>
             <a:endParaRPr lang="en-US"/>
           </a:p>
@@ -1080,7 +1080,7 @@
           <a:p>
             <a:fld id="{5BCAD085-E8A6-8845-BD4E-CB4CCA059FC4}" type="datetimeFigureOut">
               <a:rPr lang="en-US" smtClean="0"/>
-              <a:t>5/10/2026</a:t>
+              <a:t>5/11/2026</a:t>
             </a:fld>
             <a:endParaRPr lang="en-US"/>
           </a:p>
@@ -1368,7 +1368,7 @@
           <a:p>
             <a:fld id="{5BCAD085-E8A6-8845-BD4E-CB4CCA059FC4}" type="datetimeFigureOut">
               <a:rPr lang="en-US" smtClean="0"/>
-              <a:t>5/10/2026</a:t>
+              <a:t>5/11/2026</a:t>
             </a:fld>
             <a:endParaRPr lang="en-US"/>
           </a:p>
@@ -1790,7 +1790,7 @@
           <a:p>
             <a:fld id="{5BCAD085-E8A6-8845-BD4E-CB4CCA059FC4}" type="datetimeFigureOut">
               <a:rPr lang="en-US" smtClean="0"/>
-              <a:t>5/10/2026</a:t>
+              <a:t>5/11/2026</a:t>
             </a:fld>
             <a:endParaRPr lang="en-US"/>
           </a:p>
@@ -1908,7 +1908,7 @@
           <a:p>
             <a:fld id="{5BCAD085-E8A6-8845-BD4E-CB4CCA059FC4}" type="datetimeFigureOut">
               <a:rPr lang="en-US" smtClean="0"/>
-              <a:t>5/10/2026</a:t>
+              <a:t>5/11/2026</a:t>
             </a:fld>
             <a:endParaRPr lang="en-US"/>
           </a:p>
@@ -2003,7 +2003,7 @@
           <a:p>
             <a:fld id="{5BCAD085-E8A6-8845-BD4E-CB4CCA059FC4}" type="datetimeFigureOut">
               <a:rPr lang="en-US" smtClean="0"/>
-              <a:t>5/10/2026</a:t>
+              <a:t>5/11/2026</a:t>
             </a:fld>
             <a:endParaRPr lang="en-US"/>
           </a:p>
@@ -2280,7 +2280,7 @@
           <a:p>
             <a:fld id="{5BCAD085-E8A6-8845-BD4E-CB4CCA059FC4}" type="datetimeFigureOut">
               <a:rPr lang="en-US" smtClean="0"/>
-              <a:t>5/10/2026</a:t>
+              <a:t>5/11/2026</a:t>
             </a:fld>
             <a:endParaRPr lang="en-US"/>
           </a:p>
@@ -2533,7 +2533,7 @@
           <a:p>
             <a:fld id="{5BCAD085-E8A6-8845-BD4E-CB4CCA059FC4}" type="datetimeFigureOut">
               <a:rPr lang="en-US" smtClean="0"/>
-              <a:t>5/10/2026</a:t>
+              <a:t>5/11/2026</a:t>
             </a:fld>
             <a:endParaRPr lang="en-US"/>
           </a:p>
@@ -2746,7 +2746,7 @@
           <a:p>
             <a:fld id="{5BCAD085-E8A6-8845-BD4E-CB4CCA059FC4}" type="datetimeFigureOut">
               <a:rPr lang="en-US" smtClean="0"/>
-              <a:t>5/10/2026</a:t>
+              <a:t>5/11/2026</a:t>
             </a:fld>
             <a:endParaRPr lang="en-US"/>
           </a:p>
@@ -3918,7 +3918,7 @@
         <p:spPr>
           <a:xfrm>
             <a:off x="457200" y="2487168"/>
-            <a:ext cx="2468880" cy="2148840"/>
+            <a:ext cx="2468880" cy="600164"/>
           </a:xfrm>
           <a:prstGeom prst="rect">
             <a:avLst/>
@@ -3933,13 +3933,85 @@
           <a:p>
             <a:pPr algn="ctr"/>
             <a:r>
-              <a:rPr sz="1100" b="0" i="0">
-                <a:solidFill>
-                  <a:srgbClr val="7AAFF5"/>
-                </a:solidFill>
-                <a:latin typeface="Calibri"/>
-              </a:rPr>
-              <a:t>Creation d'un CV professionnel et d'un profil LinkedIn pour valoriser mon parcours BTS</a:t>
+              <a:rPr sz="1100" b="0" i="0" dirty="0">
+                <a:solidFill>
+                  <a:schemeClr val="bg1"/>
+                </a:solidFill>
+                <a:latin typeface="Calibri"/>
+              </a:rPr>
+              <a:t>Creation d'un CV </a:t>
+            </a:r>
+            <a:r>
+              <a:rPr sz="1100" b="0" i="0" dirty="0" err="1">
+                <a:solidFill>
+                  <a:schemeClr val="bg1"/>
+                </a:solidFill>
+                <a:latin typeface="Calibri"/>
+              </a:rPr>
+              <a:t>professionnel</a:t>
+            </a:r>
+            <a:r>
+              <a:rPr sz="1100" b="0" i="0" dirty="0">
+                <a:solidFill>
+                  <a:schemeClr val="bg1"/>
+                </a:solidFill>
+                <a:latin typeface="Calibri"/>
+              </a:rPr>
+              <a:t> et d'un </a:t>
+            </a:r>
+            <a:r>
+              <a:rPr sz="1100" b="0" i="0" dirty="0" err="1">
+                <a:solidFill>
+                  <a:schemeClr val="bg1"/>
+                </a:solidFill>
+                <a:latin typeface="Calibri"/>
+              </a:rPr>
+              <a:t>profil</a:t>
+            </a:r>
+            <a:r>
+              <a:rPr sz="1100" b="0" i="0" dirty="0">
+                <a:solidFill>
+                  <a:schemeClr val="bg1"/>
+                </a:solidFill>
+                <a:latin typeface="Calibri"/>
+              </a:rPr>
+              <a:t> LinkedIn pour </a:t>
+            </a:r>
+            <a:r>
+              <a:rPr sz="1100" b="0" i="0" dirty="0" err="1">
+                <a:solidFill>
+                  <a:schemeClr val="bg1"/>
+                </a:solidFill>
+                <a:latin typeface="Calibri"/>
+              </a:rPr>
+              <a:t>valoriser</a:t>
+            </a:r>
+            <a:r>
+              <a:rPr sz="1100" b="0" i="0" dirty="0">
+                <a:solidFill>
+                  <a:schemeClr val="bg1"/>
+                </a:solidFill>
+                <a:latin typeface="Calibri"/>
+              </a:rPr>
+              <a:t> mon </a:t>
+            </a:r>
+            <a:r>
+              <a:rPr sz="1100" b="0" i="0" dirty="0" err="1">
+                <a:solidFill>
+                  <a:schemeClr val="bg1"/>
+                </a:solidFill>
+                <a:latin typeface="Calibri"/>
+              </a:rPr>
+              <a:t>parcours</a:t>
+            </a:r>
+            <a:r>
+              <a:rPr sz="1100" b="0" i="0" dirty="0">
+                <a:solidFill>
+                  <a:schemeClr val="bg1"/>
+                </a:solidFill>
+                <a:latin typeface="Calibri"/>
+              </a:rPr>
+              <a:t> BTS</a:t>
             </a:r>
           </a:p>
         </p:txBody>
@@ -4180,26 +4252,26 @@
             <a:r>
               <a:rPr lang="fr-FR" sz="1100" dirty="0">
                 <a:solidFill>
-                  <a:srgbClr val="7AAFF5"/>
+                  <a:schemeClr val="bg1"/>
                 </a:solidFill>
               </a:rPr>
               <a:t>Centralisation de mes projets dans un portfolio </a:t>
             </a:r>
             <a:r>
-              <a:rPr lang="fr-FR" sz="1100" dirty="0" err="1">
-                <a:solidFill>
-                  <a:srgbClr val="7AAFF5"/>
-                </a:solidFill>
-              </a:rPr>
-              <a:t>numerique</a:t>
+              <a:rPr lang="fr-FR" sz="1100" dirty="0" smtClean="0">
+                <a:solidFill>
+                  <a:schemeClr val="bg1"/>
+                </a:solidFill>
+              </a:rPr>
+              <a:t>numérique </a:t>
             </a:r>
             <a:r>
               <a:rPr lang="fr-FR" sz="1100" dirty="0">
                 <a:solidFill>
-                  <a:srgbClr val="7AAFF5"/>
-                </a:solidFill>
-              </a:rPr>
-              <a:t> accessible en ligne</a:t>
+                  <a:schemeClr val="bg1"/>
+                </a:solidFill>
+              </a:rPr>
+              <a:t>accessible en ligne</a:t>
             </a:r>
           </a:p>
         </p:txBody>
@@ -4440,7 +4512,7 @@
             <a:r>
               <a:rPr lang="fr-FR" sz="1100" dirty="0" smtClean="0">
                 <a:solidFill>
-                  <a:srgbClr val="7AAFF5"/>
+                  <a:schemeClr val="bg1"/>
                 </a:solidFill>
               </a:rPr>
               <a:t>Mise </a:t>
@@ -4448,7 +4520,7 @@
             <a:r>
               <a:rPr lang="fr-FR" sz="1100" dirty="0">
                 <a:solidFill>
-                  <a:srgbClr val="7AAFF5"/>
+                  <a:schemeClr val="bg1"/>
                 </a:solidFill>
               </a:rPr>
               <a:t>en place </a:t>
@@ -4456,30 +4528,14 @@
             <a:r>
               <a:rPr lang="fr-FR" sz="1100" dirty="0" smtClean="0">
                 <a:solidFill>
-                  <a:srgbClr val="7AAFF5"/>
-                </a:solidFill>
-              </a:rPr>
-              <a:t>d'une veille informatique, notamment sur les effets de l’expansion de l’intelligence artificielle </a:t>
-            </a:r>
-            <a:r>
-              <a:rPr lang="fr-FR" sz="1100" dirty="0" smtClean="0">
-                <a:solidFill>
-                  <a:srgbClr val="7AAFF5"/>
-                </a:solidFill>
-              </a:rPr>
-              <a:t>sur </a:t>
-            </a:r>
-            <a:r>
-              <a:rPr lang="fr-FR" sz="1100" dirty="0" smtClean="0">
-                <a:solidFill>
-                  <a:srgbClr val="7AAFF5"/>
-                </a:solidFill>
-              </a:rPr>
-              <a:t>la RAM et le CLOUD</a:t>
+                  <a:schemeClr val="bg1"/>
+                </a:solidFill>
+              </a:rPr>
+              <a:t>d'une veille informatique, notamment sur les effets de l’expansion de l’intelligence artificielle sur la RAM et le CLOUD</a:t>
             </a:r>
             <a:endParaRPr sz="1100" b="0" i="0" dirty="0">
               <a:solidFill>
-                <a:srgbClr val="7AAFF5"/>
+                <a:schemeClr val="bg1"/>
               </a:solidFill>
               <a:latin typeface="Calibri"/>
             </a:endParaRPr>
@@ -6273,140 +6329,6 @@
       </p:sp>
       <p:sp>
         <p:nvSpPr>
-          <p:cNvPr id="3" name="Oval 2"/>
-          <p:cNvSpPr/>
-          <p:nvPr/>
-        </p:nvSpPr>
-        <p:spPr>
-          <a:xfrm>
-            <a:off x="914400" y="502920"/>
-            <a:ext cx="1737360" cy="1737360"/>
-          </a:xfrm>
-          <a:prstGeom prst="ellipse">
-            <a:avLst/>
-          </a:prstGeom>
-          <a:solidFill>
-            <a:srgbClr val="1A3A8F"/>
-          </a:solidFill>
-          <a:ln>
-            <a:solidFill>
-              <a:srgbClr val="3D7FE8"/>
-            </a:solidFill>
-          </a:ln>
-        </p:spPr>
-        <p:style>
-          <a:lnRef idx="1">
-            <a:schemeClr val="accent1"/>
-          </a:lnRef>
-          <a:fillRef idx="3">
-            <a:schemeClr val="accent1"/>
-          </a:fillRef>
-          <a:effectRef idx="2">
-            <a:schemeClr val="accent1"/>
-          </a:effectRef>
-          <a:fontRef idx="minor">
-            <a:schemeClr val="lt1"/>
-          </a:fontRef>
-        </p:style>
-        <p:txBody>
-          <a:bodyPr rtlCol="0" anchor="ctr"/>
-          <a:lstStyle/>
-          <a:p>
-            <a:pPr algn="ctr"/>
-            <a:endParaRPr/>
-          </a:p>
-        </p:txBody>
-      </p:sp>
-      <p:sp>
-        <p:nvSpPr>
-          <p:cNvPr id="4" name="Oval 3"/>
-          <p:cNvSpPr/>
-          <p:nvPr/>
-        </p:nvSpPr>
-        <p:spPr>
-          <a:xfrm>
-            <a:off x="1234440" y="658368"/>
-            <a:ext cx="1097280" cy="1097280"/>
-          </a:xfrm>
-          <a:prstGeom prst="ellipse">
-            <a:avLst/>
-          </a:prstGeom>
-          <a:solidFill>
-            <a:srgbClr val="7AAFF5"/>
-          </a:solidFill>
-          <a:ln>
-            <a:noFill/>
-          </a:ln>
-        </p:spPr>
-        <p:style>
-          <a:lnRef idx="1">
-            <a:schemeClr val="accent1"/>
-          </a:lnRef>
-          <a:fillRef idx="3">
-            <a:schemeClr val="accent1"/>
-          </a:fillRef>
-          <a:effectRef idx="2">
-            <a:schemeClr val="accent1"/>
-          </a:effectRef>
-          <a:fontRef idx="minor">
-            <a:schemeClr val="lt1"/>
-          </a:fontRef>
-        </p:style>
-        <p:txBody>
-          <a:bodyPr rtlCol="0" anchor="ctr"/>
-          <a:lstStyle/>
-          <a:p>
-            <a:pPr algn="ctr"/>
-            <a:endParaRPr/>
-          </a:p>
-        </p:txBody>
-      </p:sp>
-      <p:sp>
-        <p:nvSpPr>
-          <p:cNvPr id="5" name="Rectangle 4"/>
-          <p:cNvSpPr/>
-          <p:nvPr/>
-        </p:nvSpPr>
-        <p:spPr>
-          <a:xfrm>
-            <a:off x="1097280" y="1572768"/>
-            <a:ext cx="1371600" cy="640080"/>
-          </a:xfrm>
-          <a:prstGeom prst="rect">
-            <a:avLst/>
-          </a:prstGeom>
-          <a:solidFill>
-            <a:srgbClr val="7AAFF5"/>
-          </a:solidFill>
-          <a:ln>
-            <a:noFill/>
-          </a:ln>
-        </p:spPr>
-        <p:style>
-          <a:lnRef idx="1">
-            <a:schemeClr val="accent1"/>
-          </a:lnRef>
-          <a:fillRef idx="3">
-            <a:schemeClr val="accent1"/>
-          </a:fillRef>
-          <a:effectRef idx="2">
-            <a:schemeClr val="accent1"/>
-          </a:effectRef>
-          <a:fontRef idx="minor">
-            <a:schemeClr val="lt1"/>
-          </a:fontRef>
-        </p:style>
-        <p:txBody>
-          <a:bodyPr rtlCol="0" anchor="ctr"/>
-          <a:lstStyle/>
-          <a:p>
-            <a:pPr algn="ctr"/>
-            <a:endParaRPr/>
-          </a:p>
-        </p:txBody>
-      </p:sp>
-      <p:sp>
-        <p:nvSpPr>
           <p:cNvPr id="6" name="TextBox 5"/>
           <p:cNvSpPr txBox="1"/>
           <p:nvPr/>
@@ -9365,13 +9287,31 @@
               <a:t> a jour </a:t>
             </a:r>
             <a:r>
+              <a:rPr sz="1150" b="0" i="0" dirty="0" smtClean="0">
+                <a:solidFill>
+                  <a:srgbClr val="0A1530"/>
+                </a:solidFill>
+                <a:latin typeface="Calibri"/>
+              </a:rPr>
+              <a:t>r</a:t>
+            </a:r>
+            <a:r>
+              <a:rPr lang="fr-FR" sz="1150" b="0" i="0" dirty="0" smtClean="0">
+                <a:solidFill>
+                  <a:srgbClr val="0A1530"/>
+                </a:solidFill>
+                <a:latin typeface="Calibri"/>
+              </a:rPr>
+              <a:t>é</a:t>
+            </a:r>
+            <a:r>
               <a:rPr sz="1150" b="0" i="0" dirty="0" err="1" smtClean="0">
                 <a:solidFill>
                   <a:srgbClr val="0A1530"/>
                 </a:solidFill>
                 <a:latin typeface="Calibri"/>
               </a:rPr>
-              <a:t>reguli</a:t>
+              <a:t>guli</a:t>
             </a:r>
             <a:r>
               <a:rPr lang="fr-FR" sz="1150" b="0" i="0" dirty="0" smtClean="0">
@@ -9499,6 +9439,30 @@
           </a:p>
         </p:txBody>
       </p:sp>
+      <p:pic>
+        <p:nvPicPr>
+          <p:cNvPr id="16" name="Image 15"/>
+          <p:cNvPicPr>
+            <a:picLocks noChangeAspect="1"/>
+          </p:cNvPicPr>
+          <p:nvPr/>
+        </p:nvPicPr>
+        <p:blipFill>
+          <a:blip r:embed="rId2"/>
+          <a:stretch>
+            <a:fillRect/>
+          </a:stretch>
+        </p:blipFill>
+        <p:spPr>
+          <a:xfrm>
+            <a:off x="537743" y="3736742"/>
+            <a:ext cx="1638529" cy="762106"/>
+          </a:xfrm>
+          <a:prstGeom prst="rect">
+            <a:avLst/>
+          </a:prstGeom>
+        </p:spPr>
+      </p:pic>
     </p:spTree>
   </p:cSld>
   <p:clrMapOvr>
@@ -9639,138 +9603,6 @@
       </p:sp>
       <p:sp>
         <p:nvSpPr>
-          <p:cNvPr id="4" name="Oval 3"/>
-          <p:cNvSpPr/>
-          <p:nvPr/>
-        </p:nvSpPr>
-        <p:spPr>
-          <a:xfrm>
-            <a:off x="438912" y="1005840"/>
-            <a:ext cx="1298448" cy="1298448"/>
-          </a:xfrm>
-          <a:prstGeom prst="ellipse">
-            <a:avLst/>
-          </a:prstGeom>
-          <a:solidFill>
-            <a:srgbClr val="1A3A8F"/>
-          </a:solidFill>
-          <a:ln>
-            <a:noFill/>
-          </a:ln>
-        </p:spPr>
-        <p:style>
-          <a:lnRef idx="1">
-            <a:schemeClr val="accent1"/>
-          </a:lnRef>
-          <a:fillRef idx="3">
-            <a:schemeClr val="accent1"/>
-          </a:fillRef>
-          <a:effectRef idx="2">
-            <a:schemeClr val="accent1"/>
-          </a:effectRef>
-          <a:fontRef idx="minor">
-            <a:schemeClr val="lt1"/>
-          </a:fontRef>
-        </p:style>
-        <p:txBody>
-          <a:bodyPr rtlCol="0" anchor="ctr"/>
-          <a:lstStyle/>
-          <a:p>
-            <a:pPr algn="ctr"/>
-            <a:endParaRPr/>
-          </a:p>
-        </p:txBody>
-      </p:sp>
-      <p:sp>
-        <p:nvSpPr>
-          <p:cNvPr id="5" name="Rectangle 4"/>
-          <p:cNvSpPr/>
-          <p:nvPr/>
-        </p:nvSpPr>
-        <p:spPr>
-          <a:xfrm>
-            <a:off x="749808" y="1188720"/>
-            <a:ext cx="685800" cy="502920"/>
-          </a:xfrm>
-          <a:prstGeom prst="rect">
-            <a:avLst/>
-          </a:prstGeom>
-          <a:solidFill>
-            <a:srgbClr val="7AAFF5"/>
-          </a:solidFill>
-          <a:ln>
-            <a:noFill/>
-          </a:ln>
-        </p:spPr>
-        <p:style>
-          <a:lnRef idx="1">
-            <a:schemeClr val="accent1"/>
-          </a:lnRef>
-          <a:fillRef idx="3">
-            <a:schemeClr val="accent1"/>
-          </a:fillRef>
-          <a:effectRef idx="2">
-            <a:schemeClr val="accent1"/>
-          </a:effectRef>
-          <a:fontRef idx="minor">
-            <a:schemeClr val="lt1"/>
-          </a:fontRef>
-        </p:style>
-        <p:txBody>
-          <a:bodyPr rtlCol="0" anchor="ctr"/>
-          <a:lstStyle/>
-          <a:p>
-            <a:pPr algn="ctr"/>
-            <a:endParaRPr/>
-          </a:p>
-        </p:txBody>
-      </p:sp>
-      <p:sp>
-        <p:nvSpPr>
-          <p:cNvPr id="6" name="Oval 5"/>
-          <p:cNvSpPr/>
-          <p:nvPr/>
-        </p:nvSpPr>
-        <p:spPr>
-          <a:xfrm>
-            <a:off x="822960" y="1078992"/>
-            <a:ext cx="548640" cy="548640"/>
-          </a:xfrm>
-          <a:prstGeom prst="ellipse">
-            <a:avLst/>
-          </a:prstGeom>
-          <a:solidFill>
-            <a:srgbClr val="7AAFF5"/>
-          </a:solidFill>
-          <a:ln>
-            <a:noFill/>
-          </a:ln>
-        </p:spPr>
-        <p:style>
-          <a:lnRef idx="1">
-            <a:schemeClr val="accent1"/>
-          </a:lnRef>
-          <a:fillRef idx="3">
-            <a:schemeClr val="accent1"/>
-          </a:fillRef>
-          <a:effectRef idx="2">
-            <a:schemeClr val="accent1"/>
-          </a:effectRef>
-          <a:fontRef idx="minor">
-            <a:schemeClr val="lt1"/>
-          </a:fontRef>
-        </p:style>
-        <p:txBody>
-          <a:bodyPr rtlCol="0" anchor="ctr"/>
-          <a:lstStyle/>
-          <a:p>
-            <a:pPr algn="ctr"/>
-            <a:endParaRPr/>
-          </a:p>
-        </p:txBody>
-      </p:sp>
-      <p:sp>
-        <p:nvSpPr>
           <p:cNvPr id="7" name="Rounded Rectangle 6"/>
           <p:cNvSpPr/>
           <p:nvPr/>
@@ -11121,6 +10953,30 @@
           </a:p>
         </p:txBody>
       </p:sp>
+      <p:pic>
+        <p:nvPicPr>
+          <p:cNvPr id="26" name="Image 25"/>
+          <p:cNvPicPr>
+            <a:picLocks noChangeAspect="1"/>
+          </p:cNvPicPr>
+          <p:nvPr/>
+        </p:nvPicPr>
+        <p:blipFill>
+          <a:blip r:embed="rId2"/>
+          <a:stretch>
+            <a:fillRect/>
+          </a:stretch>
+        </p:blipFill>
+        <p:spPr>
+          <a:xfrm>
+            <a:off x="441779" y="1801368"/>
+            <a:ext cx="1295581" cy="1257475"/>
+          </a:xfrm>
+          <a:prstGeom prst="rect">
+            <a:avLst/>
+          </a:prstGeom>
+        </p:spPr>
+      </p:pic>
     </p:spTree>
   </p:cSld>
   <p:clrMapOvr>
@@ -11647,7 +11503,7 @@
             <a:r>
               <a:rPr sz="1100" b="0" i="0" dirty="0">
                 <a:solidFill>
-                  <a:srgbClr val="7AAFF5"/>
+                  <a:schemeClr val="bg1"/>
                 </a:solidFill>
                 <a:latin typeface="Calibri"/>
               </a:rPr>
@@ -11656,7 +11512,7 @@
             <a:r>
               <a:rPr sz="1100" b="0" i="0" dirty="0" err="1">
                 <a:solidFill>
-                  <a:srgbClr val="7AAFF5"/>
+                  <a:schemeClr val="bg1"/>
                 </a:solidFill>
                 <a:latin typeface="Calibri"/>
               </a:rPr>
@@ -11665,7 +11521,7 @@
             <a:r>
               <a:rPr sz="1100" b="0" i="0" dirty="0">
                 <a:solidFill>
-                  <a:srgbClr val="7AAFF5"/>
+                  <a:schemeClr val="bg1"/>
                 </a:solidFill>
                 <a:latin typeface="Calibri"/>
               </a:rPr>
@@ -11674,7 +11530,7 @@
             <a:r>
               <a:rPr sz="1100" b="0" i="0" dirty="0" err="1">
                 <a:solidFill>
-                  <a:srgbClr val="7AAFF5"/>
+                  <a:schemeClr val="bg1"/>
                 </a:solidFill>
                 <a:latin typeface="Calibri"/>
               </a:rPr>
@@ -11683,7 +11539,7 @@
             <a:r>
               <a:rPr sz="1100" b="0" i="0" dirty="0">
                 <a:solidFill>
-                  <a:srgbClr val="7AAFF5"/>
+                  <a:schemeClr val="bg1"/>
                 </a:solidFill>
                 <a:latin typeface="Calibri"/>
               </a:rPr>
@@ -11692,7 +11548,7 @@
             <a:r>
               <a:rPr sz="1100" b="0" i="0" dirty="0" err="1" smtClean="0">
                 <a:solidFill>
-                  <a:srgbClr val="7AAFF5"/>
+                  <a:schemeClr val="bg1"/>
                 </a:solidFill>
                 <a:latin typeface="Calibri"/>
               </a:rPr>
@@ -11701,7 +11557,7 @@
             <a:r>
               <a:rPr lang="fr-FR" sz="1100" b="0" i="0" dirty="0" smtClean="0">
                 <a:solidFill>
-                  <a:srgbClr val="7AAFF5"/>
+                  <a:schemeClr val="bg1"/>
                 </a:solidFill>
                 <a:latin typeface="Calibri"/>
               </a:rPr>
@@ -11710,7 +11566,7 @@
             <a:r>
               <a:rPr sz="1100" b="0" i="0" dirty="0" err="1" smtClean="0">
                 <a:solidFill>
-                  <a:srgbClr val="7AAFF5"/>
+                  <a:schemeClr val="bg1"/>
                 </a:solidFill>
                 <a:latin typeface="Calibri"/>
               </a:rPr>
@@ -11719,7 +11575,7 @@
             <a:r>
               <a:rPr lang="fr-FR" sz="1100" b="0" i="0" dirty="0" smtClean="0">
                 <a:solidFill>
-                  <a:srgbClr val="7AAFF5"/>
+                  <a:schemeClr val="bg1"/>
                 </a:solidFill>
                 <a:latin typeface="Calibri"/>
               </a:rPr>
@@ -11728,7 +11584,7 @@
             <a:r>
               <a:rPr sz="1100" b="0" i="0" dirty="0" smtClean="0">
                 <a:solidFill>
-                  <a:srgbClr val="7AAFF5"/>
+                  <a:schemeClr val="bg1"/>
                 </a:solidFill>
                 <a:latin typeface="Calibri"/>
               </a:rPr>
@@ -11737,7 +11593,7 @@
             <a:r>
               <a:rPr sz="1100" b="0" i="0" dirty="0" err="1" smtClean="0">
                 <a:solidFill>
-                  <a:srgbClr val="7AAFF5"/>
+                  <a:schemeClr val="bg1"/>
                 </a:solidFill>
                 <a:latin typeface="Calibri"/>
               </a:rPr>
@@ -11746,7 +11602,7 @@
             <a:r>
               <a:rPr lang="fr-FR" sz="1100" b="0" i="0" dirty="0" smtClean="0">
                 <a:solidFill>
-                  <a:srgbClr val="7AAFF5"/>
+                  <a:schemeClr val="bg1"/>
                 </a:solidFill>
                 <a:latin typeface="Calibri"/>
               </a:rPr>
@@ -11755,7 +11611,7 @@
             <a:r>
               <a:rPr sz="1100" b="0" i="0" dirty="0" smtClean="0">
                 <a:solidFill>
-                  <a:srgbClr val="7AAFF5"/>
+                  <a:schemeClr val="bg1"/>
                 </a:solidFill>
                 <a:latin typeface="Calibri"/>
               </a:rPr>
@@ -11764,7 +11620,7 @@
             <a:r>
               <a:rPr lang="fr-FR" sz="1100" b="0" i="0" dirty="0" smtClean="0">
                 <a:solidFill>
-                  <a:srgbClr val="7AAFF5"/>
+                  <a:schemeClr val="bg1"/>
                 </a:solidFill>
                 <a:latin typeface="Calibri"/>
               </a:rPr>
@@ -11773,7 +11629,7 @@
             <a:r>
               <a:rPr sz="1100" b="0" i="0" dirty="0" err="1" smtClean="0">
                 <a:solidFill>
-                  <a:srgbClr val="7AAFF5"/>
+                  <a:schemeClr val="bg1"/>
                 </a:solidFill>
                 <a:latin typeface="Calibri"/>
               </a:rPr>
@@ -11782,7 +11638,7 @@
             <a:r>
               <a:rPr lang="fr-FR" sz="1100" b="0" i="0" dirty="0" smtClean="0">
                 <a:solidFill>
-                  <a:srgbClr val="7AAFF5"/>
+                  <a:schemeClr val="bg1"/>
                 </a:solidFill>
                 <a:latin typeface="Calibri"/>
               </a:rPr>
@@ -11790,7 +11646,7 @@
             </a:r>
             <a:endParaRPr sz="1100" b="0" i="0" dirty="0">
               <a:solidFill>
-                <a:srgbClr val="7AAFF5"/>
+                <a:schemeClr val="bg1"/>
               </a:solidFill>
               <a:latin typeface="Calibri"/>
             </a:endParaRPr>
@@ -12027,7 +11883,7 @@
             <a:r>
               <a:rPr sz="1100" b="0" i="0" dirty="0" err="1">
                 <a:solidFill>
-                  <a:srgbClr val="7AAFF5"/>
+                  <a:schemeClr val="bg1"/>
                 </a:solidFill>
                 <a:latin typeface="Calibri"/>
               </a:rPr>
@@ -12036,7 +11892,7 @@
             <a:r>
               <a:rPr sz="1100" b="0" i="0" dirty="0">
                 <a:solidFill>
-                  <a:srgbClr val="7AAFF5"/>
+                  <a:schemeClr val="bg1"/>
                 </a:solidFill>
                 <a:latin typeface="Calibri"/>
               </a:rPr>
@@ -12045,7 +11901,7 @@
             <a:r>
               <a:rPr sz="1100" b="0" i="0" dirty="0" err="1" smtClean="0">
                 <a:solidFill>
-                  <a:srgbClr val="7AAFF5"/>
+                  <a:schemeClr val="bg1"/>
                 </a:solidFill>
                 <a:latin typeface="Calibri"/>
               </a:rPr>
@@ -12054,7 +11910,7 @@
             <a:r>
               <a:rPr lang="fr-FR" sz="1100" b="0" i="0" dirty="0" smtClean="0">
                 <a:solidFill>
-                  <a:srgbClr val="7AAFF5"/>
+                  <a:schemeClr val="bg1"/>
                 </a:solidFill>
                 <a:latin typeface="Calibri"/>
               </a:rPr>
@@ -12063,7 +11919,7 @@
             <a:r>
               <a:rPr sz="1100" b="0" i="0" dirty="0" smtClean="0">
                 <a:solidFill>
-                  <a:srgbClr val="7AAFF5"/>
+                  <a:schemeClr val="bg1"/>
                 </a:solidFill>
                 <a:latin typeface="Calibri"/>
               </a:rPr>
@@ -12072,7 +11928,7 @@
             <a:r>
               <a:rPr sz="1100" b="0" i="0" dirty="0">
                 <a:solidFill>
-                  <a:srgbClr val="7AAFF5"/>
+                  <a:schemeClr val="bg1"/>
                 </a:solidFill>
                 <a:latin typeface="Calibri"/>
               </a:rPr>
@@ -12081,7 +11937,7 @@
             <a:r>
               <a:rPr lang="fr-FR" sz="1100" dirty="0" smtClean="0">
                 <a:solidFill>
-                  <a:srgbClr val="7AAFF5"/>
+                  <a:schemeClr val="bg1"/>
                 </a:solidFill>
                 <a:latin typeface="Calibri"/>
               </a:rPr>
@@ -12089,7 +11945,7 @@
             </a:r>
             <a:endParaRPr sz="1100" b="0" i="0" dirty="0">
               <a:solidFill>
-                <a:srgbClr val="7AAFF5"/>
+                <a:schemeClr val="bg1"/>
               </a:solidFill>
               <a:latin typeface="Calibri"/>
             </a:endParaRPr>
@@ -12150,6 +12006,30 @@
           </a:p>
         </p:txBody>
       </p:sp>
+      <p:pic>
+        <p:nvPicPr>
+          <p:cNvPr id="17" name="Image 16"/>
+          <p:cNvPicPr>
+            <a:picLocks noChangeAspect="1"/>
+          </p:cNvPicPr>
+          <p:nvPr/>
+        </p:nvPicPr>
+        <p:blipFill>
+          <a:blip r:embed="rId2"/>
+          <a:stretch>
+            <a:fillRect/>
+          </a:stretch>
+        </p:blipFill>
+        <p:spPr>
+          <a:xfrm>
+            <a:off x="6306333" y="1920240"/>
+            <a:ext cx="2581635" cy="1724266"/>
+          </a:xfrm>
+          <a:prstGeom prst="rect">
+            <a:avLst/>
+          </a:prstGeom>
+        </p:spPr>
+      </p:pic>
     </p:spTree>
   </p:cSld>
   <p:clrMapOvr>
@@ -12290,138 +12170,6 @@
       </p:sp>
       <p:sp>
         <p:nvSpPr>
-          <p:cNvPr id="4" name="Oval 3"/>
-          <p:cNvSpPr/>
-          <p:nvPr/>
-        </p:nvSpPr>
-        <p:spPr>
-          <a:xfrm>
-            <a:off x="438912" y="1005840"/>
-            <a:ext cx="1298448" cy="1298448"/>
-          </a:xfrm>
-          <a:prstGeom prst="ellipse">
-            <a:avLst/>
-          </a:prstGeom>
-          <a:solidFill>
-            <a:srgbClr val="1A3A8F"/>
-          </a:solidFill>
-          <a:ln>
-            <a:noFill/>
-          </a:ln>
-        </p:spPr>
-        <p:style>
-          <a:lnRef idx="1">
-            <a:schemeClr val="accent1"/>
-          </a:lnRef>
-          <a:fillRef idx="3">
-            <a:schemeClr val="accent1"/>
-          </a:fillRef>
-          <a:effectRef idx="2">
-            <a:schemeClr val="accent1"/>
-          </a:effectRef>
-          <a:fontRef idx="minor">
-            <a:schemeClr val="lt1"/>
-          </a:fontRef>
-        </p:style>
-        <p:txBody>
-          <a:bodyPr rtlCol="0" anchor="ctr"/>
-          <a:lstStyle/>
-          <a:p>
-            <a:pPr algn="ctr"/>
-            <a:endParaRPr/>
-          </a:p>
-        </p:txBody>
-      </p:sp>
-      <p:sp>
-        <p:nvSpPr>
-          <p:cNvPr id="5" name="Rectangle 4"/>
-          <p:cNvSpPr/>
-          <p:nvPr/>
-        </p:nvSpPr>
-        <p:spPr>
-          <a:xfrm>
-            <a:off x="749808" y="1188720"/>
-            <a:ext cx="685800" cy="502920"/>
-          </a:xfrm>
-          <a:prstGeom prst="rect">
-            <a:avLst/>
-          </a:prstGeom>
-          <a:solidFill>
-            <a:srgbClr val="7AAFF5"/>
-          </a:solidFill>
-          <a:ln>
-            <a:noFill/>
-          </a:ln>
-        </p:spPr>
-        <p:style>
-          <a:lnRef idx="1">
-            <a:schemeClr val="accent1"/>
-          </a:lnRef>
-          <a:fillRef idx="3">
-            <a:schemeClr val="accent1"/>
-          </a:fillRef>
-          <a:effectRef idx="2">
-            <a:schemeClr val="accent1"/>
-          </a:effectRef>
-          <a:fontRef idx="minor">
-            <a:schemeClr val="lt1"/>
-          </a:fontRef>
-        </p:style>
-        <p:txBody>
-          <a:bodyPr rtlCol="0" anchor="ctr"/>
-          <a:lstStyle/>
-          <a:p>
-            <a:pPr algn="ctr"/>
-            <a:endParaRPr/>
-          </a:p>
-        </p:txBody>
-      </p:sp>
-      <p:sp>
-        <p:nvSpPr>
-          <p:cNvPr id="6" name="Oval 5"/>
-          <p:cNvSpPr/>
-          <p:nvPr/>
-        </p:nvSpPr>
-        <p:spPr>
-          <a:xfrm>
-            <a:off x="822960" y="1078992"/>
-            <a:ext cx="548640" cy="548640"/>
-          </a:xfrm>
-          <a:prstGeom prst="ellipse">
-            <a:avLst/>
-          </a:prstGeom>
-          <a:solidFill>
-            <a:srgbClr val="7AAFF5"/>
-          </a:solidFill>
-          <a:ln>
-            <a:noFill/>
-          </a:ln>
-        </p:spPr>
-        <p:style>
-          <a:lnRef idx="1">
-            <a:schemeClr val="accent1"/>
-          </a:lnRef>
-          <a:fillRef idx="3">
-            <a:schemeClr val="accent1"/>
-          </a:fillRef>
-          <a:effectRef idx="2">
-            <a:schemeClr val="accent1"/>
-          </a:effectRef>
-          <a:fontRef idx="minor">
-            <a:schemeClr val="lt1"/>
-          </a:fontRef>
-        </p:style>
-        <p:txBody>
-          <a:bodyPr rtlCol="0" anchor="ctr"/>
-          <a:lstStyle/>
-          <a:p>
-            <a:pPr algn="ctr"/>
-            <a:endParaRPr/>
-          </a:p>
-        </p:txBody>
-      </p:sp>
-      <p:sp>
-        <p:nvSpPr>
           <p:cNvPr id="7" name="Rounded Rectangle 6"/>
           <p:cNvSpPr/>
           <p:nvPr/>
@@ -13577,6 +13325,30 @@
           </a:p>
         </p:txBody>
       </p:sp>
+      <p:pic>
+        <p:nvPicPr>
+          <p:cNvPr id="26" name="Image 25"/>
+          <p:cNvPicPr>
+            <a:picLocks noChangeAspect="1"/>
+          </p:cNvPicPr>
+          <p:nvPr/>
+        </p:nvPicPr>
+        <p:blipFill>
+          <a:blip r:embed="rId2"/>
+          <a:stretch>
+            <a:fillRect/>
+          </a:stretch>
+        </p:blipFill>
+        <p:spPr>
+          <a:xfrm>
+            <a:off x="340813" y="1892808"/>
+            <a:ext cx="1567952" cy="1190330"/>
+          </a:xfrm>
+          <a:prstGeom prst="rect">
+            <a:avLst/>
+          </a:prstGeom>
+        </p:spPr>
+      </p:pic>
     </p:spTree>
   </p:cSld>
   <p:clrMapOvr>

--- a/Compte_Rendu/Presentation_bts_final.pptx
+++ b/Compte_Rendu/Presentation_bts_final.pptx
@@ -314,7 +314,7 @@
           <a:p>
             <a:fld id="{5BCAD085-E8A6-8845-BD4E-CB4CCA059FC4}" type="datetimeFigureOut">
               <a:rPr lang="en-US" smtClean="0"/>
-              <a:t>5/11/2026</a:t>
+              <a:t>5/12/2026</a:t>
             </a:fld>
             <a:endParaRPr lang="en-US"/>
           </a:p>
@@ -484,7 +484,7 @@
           <a:p>
             <a:fld id="{5BCAD085-E8A6-8845-BD4E-CB4CCA059FC4}" type="datetimeFigureOut">
               <a:rPr lang="en-US" smtClean="0"/>
-              <a:t>5/11/2026</a:t>
+              <a:t>5/12/2026</a:t>
             </a:fld>
             <a:endParaRPr lang="en-US"/>
           </a:p>
@@ -664,7 +664,7 @@
           <a:p>
             <a:fld id="{5BCAD085-E8A6-8845-BD4E-CB4CCA059FC4}" type="datetimeFigureOut">
               <a:rPr lang="en-US" smtClean="0"/>
-              <a:t>5/11/2026</a:t>
+              <a:t>5/12/2026</a:t>
             </a:fld>
             <a:endParaRPr lang="en-US"/>
           </a:p>
@@ -834,7 +834,7 @@
           <a:p>
             <a:fld id="{5BCAD085-E8A6-8845-BD4E-CB4CCA059FC4}" type="datetimeFigureOut">
               <a:rPr lang="en-US" smtClean="0"/>
-              <a:t>5/11/2026</a:t>
+              <a:t>5/12/2026</a:t>
             </a:fld>
             <a:endParaRPr lang="en-US"/>
           </a:p>
@@ -1080,7 +1080,7 @@
           <a:p>
             <a:fld id="{5BCAD085-E8A6-8845-BD4E-CB4CCA059FC4}" type="datetimeFigureOut">
               <a:rPr lang="en-US" smtClean="0"/>
-              <a:t>5/11/2026</a:t>
+              <a:t>5/12/2026</a:t>
             </a:fld>
             <a:endParaRPr lang="en-US"/>
           </a:p>
@@ -1368,7 +1368,7 @@
           <a:p>
             <a:fld id="{5BCAD085-E8A6-8845-BD4E-CB4CCA059FC4}" type="datetimeFigureOut">
               <a:rPr lang="en-US" smtClean="0"/>
-              <a:t>5/11/2026</a:t>
+              <a:t>5/12/2026</a:t>
             </a:fld>
             <a:endParaRPr lang="en-US"/>
           </a:p>
@@ -1790,7 +1790,7 @@
           <a:p>
             <a:fld id="{5BCAD085-E8A6-8845-BD4E-CB4CCA059FC4}" type="datetimeFigureOut">
               <a:rPr lang="en-US" smtClean="0"/>
-              <a:t>5/11/2026</a:t>
+              <a:t>5/12/2026</a:t>
             </a:fld>
             <a:endParaRPr lang="en-US"/>
           </a:p>
@@ -1908,7 +1908,7 @@
           <a:p>
             <a:fld id="{5BCAD085-E8A6-8845-BD4E-CB4CCA059FC4}" type="datetimeFigureOut">
               <a:rPr lang="en-US" smtClean="0"/>
-              <a:t>5/11/2026</a:t>
+              <a:t>5/12/2026</a:t>
             </a:fld>
             <a:endParaRPr lang="en-US"/>
           </a:p>
@@ -2003,7 +2003,7 @@
           <a:p>
             <a:fld id="{5BCAD085-E8A6-8845-BD4E-CB4CCA059FC4}" type="datetimeFigureOut">
               <a:rPr lang="en-US" smtClean="0"/>
-              <a:t>5/11/2026</a:t>
+              <a:t>5/12/2026</a:t>
             </a:fld>
             <a:endParaRPr lang="en-US"/>
           </a:p>
@@ -2280,7 +2280,7 @@
           <a:p>
             <a:fld id="{5BCAD085-E8A6-8845-BD4E-CB4CCA059FC4}" type="datetimeFigureOut">
               <a:rPr lang="en-US" smtClean="0"/>
-              <a:t>5/11/2026</a:t>
+              <a:t>5/12/2026</a:t>
             </a:fld>
             <a:endParaRPr lang="en-US"/>
           </a:p>
@@ -2533,7 +2533,7 @@
           <a:p>
             <a:fld id="{5BCAD085-E8A6-8845-BD4E-CB4CCA059FC4}" type="datetimeFigureOut">
               <a:rPr lang="en-US" smtClean="0"/>
-              <a:t>5/11/2026</a:t>
+              <a:t>5/12/2026</a:t>
             </a:fld>
             <a:endParaRPr lang="en-US"/>
           </a:p>
@@ -2746,7 +2746,7 @@
           <a:p>
             <a:fld id="{5BCAD085-E8A6-8845-BD4E-CB4CCA059FC4}" type="datetimeFigureOut">
               <a:rPr lang="en-US" smtClean="0"/>
-              <a:t>5/11/2026</a:t>
+              <a:t>5/12/2026</a:t>
             </a:fld>
             <a:endParaRPr lang="en-US"/>
           </a:p>
@@ -4531,7 +4531,15 @@
                   <a:schemeClr val="bg1"/>
                 </a:solidFill>
               </a:rPr>
-              <a:t>d'une veille informatique, notamment sur les effets de l’expansion de l’intelligence artificielle sur la RAM et le CLOUD</a:t>
+              <a:t>d'une veille informatique, notamment sur les effets de l’expansion de l’intelligence artificielle sur la RAM </a:t>
+            </a:r>
+            <a:r>
+              <a:rPr lang="fr-FR" sz="1100" dirty="0" smtClean="0">
+                <a:solidFill>
+                  <a:schemeClr val="bg1"/>
+                </a:solidFill>
+              </a:rPr>
+              <a:t>et son prix.</a:t>
             </a:r>
             <a:endParaRPr sz="1100" b="0" i="0" dirty="0">
               <a:solidFill>
